--- a/m4/diapositivos/sessao-12-m4-f11.pptx
+++ b/m4/diapositivos/sessao-12-m4-f11.pptx
@@ -2598,7 +2598,35 @@
                 <a:ea typeface="Arial" pitchFamily="34" charset="-122"/>
                 <a:cs typeface="Arial" pitchFamily="34" charset="-120"/>
               </a:rPr>
-              <a:t>Padre António Vieira, Sermão de Santo António (1654), ortografia atualizada, cap. VI.</a:t>
+              <a:t>Padre António Vieira, </a:t>
+            </a:r>
+            <a:pPr indent="0" marL="0">
+              <a:buNone/>
+            </a:pPr>
+            <a:r>
+              <a:rPr lang="en-US" sz="1200" i="1" dirty="0">
+                <a:solidFill>
+                  <a:srgbClr val="A9A79F"/>
+                </a:solidFill>
+                <a:latin typeface="Arial" pitchFamily="34" charset="0"/>
+                <a:ea typeface="Arial" pitchFamily="34" charset="-122"/>
+                <a:cs typeface="Arial" pitchFamily="34" charset="-120"/>
+              </a:rPr>
+              <a:t>Sermão de Santo António</a:t>
+            </a:r>
+            <a:pPr indent="0" marL="0">
+              <a:buNone/>
+            </a:pPr>
+            <a:r>
+              <a:rPr lang="en-US" sz="1200" dirty="0">
+                <a:solidFill>
+                  <a:srgbClr val="A9A79F"/>
+                </a:solidFill>
+                <a:latin typeface="Arial" pitchFamily="34" charset="0"/>
+                <a:ea typeface="Arial" pitchFamily="34" charset="-122"/>
+                <a:cs typeface="Arial" pitchFamily="34" charset="-120"/>
+              </a:rPr>
+              <a:t> (1654), ortografia atualizada, cap. VI.</a:t>
             </a:r>
             <a:endParaRPr lang="en-US" sz="1200" dirty="0"/>
           </a:p>
@@ -2938,7 +2966,35 @@
                 <a:ea typeface="Arial" pitchFamily="34" charset="-122"/>
                 <a:cs typeface="Arial" pitchFamily="34" charset="-120"/>
               </a:rPr>
-              <a:t>Almeida Garrett, Frei Luís de Sousa (1844), ortografia atualizada, ato II, cena XV.</a:t>
+              <a:t>Almeida Garrett, </a:t>
+            </a:r>
+            <a:pPr indent="0" marL="0">
+              <a:buNone/>
+            </a:pPr>
+            <a:r>
+              <a:rPr lang="en-US" sz="1200" i="1" dirty="0">
+                <a:solidFill>
+                  <a:srgbClr val="A9A79F"/>
+                </a:solidFill>
+                <a:latin typeface="Arial" pitchFamily="34" charset="0"/>
+                <a:ea typeface="Arial" pitchFamily="34" charset="-122"/>
+                <a:cs typeface="Arial" pitchFamily="34" charset="-120"/>
+              </a:rPr>
+              <a:t>Frei Luís de Sousa</a:t>
+            </a:r>
+            <a:pPr indent="0" marL="0">
+              <a:buNone/>
+            </a:pPr>
+            <a:r>
+              <a:rPr lang="en-US" sz="1200" dirty="0">
+                <a:solidFill>
+                  <a:srgbClr val="A9A79F"/>
+                </a:solidFill>
+                <a:latin typeface="Arial" pitchFamily="34" charset="0"/>
+                <a:ea typeface="Arial" pitchFamily="34" charset="-122"/>
+                <a:cs typeface="Arial" pitchFamily="34" charset="-120"/>
+              </a:rPr>
+              <a:t> (1844), ortografia atualizada, ato II, cena XV.</a:t>
             </a:r>
             <a:endParaRPr lang="en-US" sz="1200" dirty="0"/>
           </a:p>
